--- a/downloads/gas-presentation-1404.pptx
+++ b/downloads/gas-presentation-1404.pptx
@@ -3254,7 +3254,7 @@
                 </a:solidFill>
                 <a:latin typeface="Tahoma"/>
               </a:rPr>
-              <a:t>شرکت ملی گاز ایران — مدیریت گازرسانی، امور تعرفه‌ها و قراردادها</a:t>
+              <a:t>شرکت ملی گاز ایران — مدیریت گازرسانی — امور تعرفه‌ها و قراردادها</a:t>
             </a:r>
           </a:p>
         </p:txBody>
@@ -3328,7 +3328,7 @@
             <a:r>
               <a:rPr sz="3200" b="1">
                 <a:solidFill>
-                  <a:srgbClr val="F08040"/>
+                  <a:srgbClr val="D95926"/>
                 </a:solidFill>
                 <a:latin typeface="Tahoma"/>
               </a:rPr>
@@ -3371,7 +3371,7 @@
                 </a:solidFill>
                 <a:latin typeface="Tahoma"/>
               </a:rPr>
-              <a:t>تحلیل مصرف گاز بخش خانگی سال ۱۴۰۴ به تفکیک پلهٔ تعرفه و استان</a:t>
+              <a:t>تحلیل مصرف گاز خانگی به تفکیک پله و استان — ۱۴۰۴</a:t>
             </a:r>
           </a:p>
           <a:p>

--- a/downloads/gas-presentation-1404.pptx
+++ b/downloads/gas-presentation-1404.pptx
@@ -17,6 +17,10 @@
     <p:sldId id="265" r:id="rId16"/>
     <p:sldId id="266" r:id="rId17"/>
     <p:sldId id="267" r:id="rId18"/>
+    <p:sldId id="268" r:id="rId19"/>
+    <p:sldId id="269" r:id="rId20"/>
+    <p:sldId id="270" r:id="rId21"/>
+    <p:sldId id="271" r:id="rId22"/>
   </p:sldIdLst>
   <p:sldSz cx="12191695" cy="6858000" type="screen4x3"/>
   <p:notesSz cx="6858000" cy="9144000"/>
@@ -6574,6 +6578,1771 @@
 </file>
 
 <file path=ppt/slides/slide12.xml><?xml version="1.0" encoding="utf-8"?>
+<p:sld xmlns:a="http://schemas.openxmlformats.org/drawingml/2006/main" xmlns:p="http://schemas.openxmlformats.org/presentationml/2006/main" xmlns:r="http://schemas.openxmlformats.org/officeDocument/2006/relationships">
+  <p:cSld>
+    <p:bg>
+      <p:bgPr>
+        <a:solidFill>
+          <a:srgbClr val="0A0E14"/>
+        </a:solidFill>
+        <a:effectLst/>
+      </p:bgPr>
+    </p:bg>
+    <p:spTree>
+      <p:nvGrpSpPr>
+        <p:cNvPr id="1" name=""/>
+        <p:cNvGrpSpPr/>
+        <p:nvPr/>
+      </p:nvGrpSpPr>
+      <p:grpSpPr/>
+      <p:sp>
+        <p:nvSpPr>
+          <p:cNvPr id="2" name="TextBox 1"/>
+          <p:cNvSpPr txBox="1"/>
+          <p:nvPr/>
+        </p:nvSpPr>
+        <p:spPr>
+          <a:xfrm>
+            <a:off x="566928" y="347472"/>
+            <a:ext cx="11064240" cy="310896"/>
+          </a:xfrm>
+          <a:prstGeom prst="rect">
+            <a:avLst/>
+          </a:prstGeom>
+          <a:noFill/>
+        </p:spPr>
+        <p:txBody>
+          <a:bodyPr wrap="square" anchor="t">
+            <a:spAutoFit/>
+          </a:bodyPr>
+          <a:lstStyle/>
+          <a:p>
+            <a:pPr algn="r" rtl="1">
+              <a:lnSpc>
+                <a:spcPct val="125000"/>
+              </a:lnSpc>
+            </a:pPr>
+            <a:r>
+              <a:rPr sz="1200" b="1">
+                <a:solidFill>
+                  <a:srgbClr val="F08040"/>
+                </a:solidFill>
+                <a:latin typeface="Tahoma"/>
+              </a:rPr>
+              <a:t>تفسیر</a:t>
+            </a:r>
+          </a:p>
+        </p:txBody>
+      </p:sp>
+      <p:sp>
+        <p:nvSpPr>
+          <p:cNvPr id="3" name="TextBox 2"/>
+          <p:cNvSpPr txBox="1"/>
+          <p:nvPr/>
+        </p:nvSpPr>
+        <p:spPr>
+          <a:xfrm>
+            <a:off x="566928" y="658368"/>
+            <a:ext cx="11064240" cy="658368"/>
+          </a:xfrm>
+          <a:prstGeom prst="rect">
+            <a:avLst/>
+          </a:prstGeom>
+          <a:noFill/>
+        </p:spPr>
+        <p:txBody>
+          <a:bodyPr wrap="square" anchor="t">
+            <a:spAutoFit/>
+          </a:bodyPr>
+          <a:lstStyle/>
+          <a:p>
+            <a:pPr algn="r" rtl="1">
+              <a:lnSpc>
+                <a:spcPct val="125000"/>
+              </a:lnSpc>
+            </a:pPr>
+            <a:r>
+              <a:rPr sz="3000" b="1">
+                <a:solidFill>
+                  <a:srgbClr val="F2F5F8"/>
+                </a:solidFill>
+                <a:latin typeface="Tahoma"/>
+              </a:rPr>
+              <a:t>این ارقام یعنی چه؟</a:t>
+            </a:r>
+          </a:p>
+        </p:txBody>
+      </p:sp>
+      <p:sp>
+        <p:nvSpPr>
+          <p:cNvPr id="4" name="Rounded Rectangle 3"/>
+          <p:cNvSpPr/>
+          <p:nvPr/>
+        </p:nvSpPr>
+        <p:spPr>
+          <a:xfrm>
+            <a:off x="566928" y="1417320"/>
+            <a:ext cx="11064240" cy="1051560"/>
+          </a:xfrm>
+          <a:prstGeom prst="roundRect">
+            <a:avLst>
+              <a:gd name="adj" fmla="val 6000"/>
+            </a:avLst>
+          </a:prstGeom>
+          <a:solidFill>
+            <a:srgbClr val="141922"/>
+          </a:solidFill>
+          <a:ln>
+            <a:noFill/>
+          </a:ln>
+          <a:effectLst/>
+        </p:spPr>
+        <p:style>
+          <a:lnRef idx="1">
+            <a:schemeClr val="accent1"/>
+          </a:lnRef>
+          <a:fillRef idx="3">
+            <a:schemeClr val="accent1"/>
+          </a:fillRef>
+          <a:effectRef idx="2">
+            <a:schemeClr val="accent1"/>
+          </a:effectRef>
+          <a:fontRef idx="minor">
+            <a:schemeClr val="lt1"/>
+          </a:fontRef>
+        </p:style>
+        <p:txBody>
+          <a:bodyPr rtlCol="0" anchor="ctr"/>
+          <a:lstStyle/>
+          <a:p>
+            <a:pPr algn="ctr"/>
+          </a:p>
+        </p:txBody>
+      </p:sp>
+      <p:sp>
+        <p:nvSpPr>
+          <p:cNvPr id="5" name="TextBox 4"/>
+          <p:cNvSpPr txBox="1"/>
+          <p:nvPr/>
+        </p:nvSpPr>
+        <p:spPr>
+          <a:xfrm>
+            <a:off x="795528" y="1554480"/>
+            <a:ext cx="10607040" cy="822960"/>
+          </a:xfrm>
+          <a:prstGeom prst="rect">
+            <a:avLst/>
+          </a:prstGeom>
+          <a:noFill/>
+        </p:spPr>
+        <p:txBody>
+          <a:bodyPr wrap="square" anchor="t">
+            <a:spAutoFit/>
+          </a:bodyPr>
+          <a:lstStyle/>
+          <a:p>
+            <a:pPr algn="r" rtl="1">
+              <a:lnSpc>
+                <a:spcPct val="125000"/>
+              </a:lnSpc>
+            </a:pPr>
+            <a:r>
+              <a:rPr sz="1200" b="0">
+                <a:solidFill>
+                  <a:srgbClr val="A8B3C2"/>
+                </a:solidFill>
+                <a:latin typeface="Tahoma"/>
+              </a:rPr>
+              <a:t>اعداد فصل‌های پیشین یک الگوی آشنا را نشان می‌دهند: یارانهٔ انرژی که به‌صورت یکسان روی تعرفه سوار شده، در عمل نامتقارن توزیع می‌شود. هرچه مشترک بالاتر روی نردبان باشد، سهم بیشتری از این یارانه می‌برد — نه چون نیازمندتر است، بلکه چون بیشتر مصرف می‌کند.</a:t>
+            </a:r>
+          </a:p>
+        </p:txBody>
+      </p:sp>
+      <p:sp>
+        <p:nvSpPr>
+          <p:cNvPr id="6" name="Rounded Rectangle 5"/>
+          <p:cNvSpPr/>
+          <p:nvPr/>
+        </p:nvSpPr>
+        <p:spPr>
+          <a:xfrm>
+            <a:off x="566928" y="2651760"/>
+            <a:ext cx="11064240" cy="3291840"/>
+          </a:xfrm>
+          <a:prstGeom prst="roundRect">
+            <a:avLst>
+              <a:gd name="adj" fmla="val 6000"/>
+            </a:avLst>
+          </a:prstGeom>
+          <a:solidFill>
+            <a:srgbClr val="141922"/>
+          </a:solidFill>
+          <a:ln>
+            <a:noFill/>
+          </a:ln>
+          <a:effectLst/>
+        </p:spPr>
+        <p:style>
+          <a:lnRef idx="1">
+            <a:schemeClr val="accent1"/>
+          </a:lnRef>
+          <a:fillRef idx="3">
+            <a:schemeClr val="accent1"/>
+          </a:fillRef>
+          <a:effectRef idx="2">
+            <a:schemeClr val="accent1"/>
+          </a:effectRef>
+          <a:fontRef idx="minor">
+            <a:schemeClr val="lt1"/>
+          </a:fontRef>
+        </p:style>
+        <p:txBody>
+          <a:bodyPr rtlCol="0" anchor="ctr"/>
+          <a:lstStyle/>
+          <a:p>
+            <a:pPr algn="ctr"/>
+          </a:p>
+        </p:txBody>
+      </p:sp>
+      <p:sp>
+        <p:nvSpPr>
+          <p:cNvPr id="7" name="TextBox 6"/>
+          <p:cNvSpPr txBox="1"/>
+          <p:nvPr/>
+        </p:nvSpPr>
+        <p:spPr>
+          <a:xfrm>
+            <a:off x="795528" y="2834640"/>
+            <a:ext cx="10607040" cy="2926080"/>
+          </a:xfrm>
+          <a:prstGeom prst="rect">
+            <a:avLst/>
+          </a:prstGeom>
+          <a:noFill/>
+        </p:spPr>
+        <p:txBody>
+          <a:bodyPr wrap="square" anchor="t">
+            <a:spAutoFit/>
+          </a:bodyPr>
+          <a:lstStyle/>
+          <a:p>
+            <a:pPr algn="r" rtl="1">
+              <a:lnSpc>
+                <a:spcPct val="125000"/>
+              </a:lnSpc>
+            </a:pPr>
+            <a:r>
+              <a:rPr sz="1200" b="0">
+                <a:solidFill>
+                  <a:srgbClr val="A8B3C2"/>
+                </a:solidFill>
+                <a:latin typeface="Tahoma"/>
+              </a:rPr>
+              <a:t>یارانه با مصرف بالا می‌رود، نه با نیاز</a:t>
+            </a:r>
+          </a:p>
+          <a:p>
+            <a:pPr algn="r" rtl="1">
+              <a:lnSpc>
+                <a:spcPct val="125000"/>
+              </a:lnSpc>
+            </a:pPr>
+            <a:r>
+              <a:rPr sz="1200" b="0">
+                <a:solidFill>
+                  <a:srgbClr val="A8B3C2"/>
+                </a:solidFill>
+                <a:latin typeface="Tahoma"/>
+              </a:rPr>
+              <a:t>دولت برای هر واحد گاز، صرف‌نظر از پلهٔ مصرف، یارانه می‌پردازد. نتیجه این است که ۱۴٫۴٪ از مشترکین که بالاتر از الگو مصرف می‌کنند، بزرگ‌ترین سهم مطلق یارانهٔ پنهان را دریافت می‌کنند.</a:t>
+            </a:r>
+          </a:p>
+          <a:p>
+            <a:pPr algn="r" rtl="1">
+              <a:lnSpc>
+                <a:spcPct val="125000"/>
+              </a:lnSpc>
+            </a:pPr>
+          </a:p>
+          <a:p>
+            <a:pPr algn="r" rtl="1">
+              <a:lnSpc>
+                <a:spcPct val="125000"/>
+              </a:lnSpc>
+            </a:pPr>
+            <a:r>
+              <a:rPr sz="1200" b="0">
+                <a:solidFill>
+                  <a:srgbClr val="A8B3C2"/>
+                </a:solidFill>
+                <a:latin typeface="Tahoma"/>
+              </a:rPr>
+              <a:t>سرما فقط بخشی از ماجراست</a:t>
+            </a:r>
+          </a:p>
+          <a:p>
+            <a:pPr algn="r" rtl="1">
+              <a:lnSpc>
+                <a:spcPct val="125000"/>
+              </a:lnSpc>
+            </a:pPr>
+            <a:r>
+              <a:rPr sz="1200" b="0">
+                <a:solidFill>
+                  <a:srgbClr val="A8B3C2"/>
+                </a:solidFill>
+                <a:latin typeface="Tahoma"/>
+              </a:rPr>
+              <a:t>میانگین دمای استان تنها بخشی از پراکندگی مصرف مازاد را توضیح می‌دهد. باقی‌مانده را باید در عایق‌بندی ساختمان، سن وسایل گرمایشی، الگوی رفتاری خانوار و ضعف سیگنال قیمتی در پله‌های بالا جست‌وجو کرد.</a:t>
+            </a:r>
+          </a:p>
+          <a:p>
+            <a:pPr algn="r" rtl="1">
+              <a:lnSpc>
+                <a:spcPct val="125000"/>
+              </a:lnSpc>
+            </a:pPr>
+          </a:p>
+          <a:p>
+            <a:pPr algn="r" rtl="1">
+              <a:lnSpc>
+                <a:spcPct val="125000"/>
+              </a:lnSpc>
+            </a:pPr>
+            <a:r>
+              <a:rPr sz="1200" b="0">
+                <a:solidFill>
+                  <a:srgbClr val="A8B3C2"/>
+                </a:solidFill>
+                <a:latin typeface="Tahoma"/>
+              </a:rPr>
+              <a:t>شیب تعرفه در بالای نردبان کم‌جان است</a:t>
+            </a:r>
+          </a:p>
+          <a:p>
+            <a:pPr algn="r" rtl="1">
+              <a:lnSpc>
+                <a:spcPct val="125000"/>
+              </a:lnSpc>
+            </a:pPr>
+            <a:r>
+              <a:rPr sz="1200" b="0">
+                <a:solidFill>
+                  <a:srgbClr val="A8B3C2"/>
+                </a:solidFill>
+                <a:latin typeface="Tahoma"/>
+              </a:rPr>
+              <a:t>وقتی فاصلهٔ قیمتی میان پله‌های بالا کم باشد، مشترک پرمصرف انگیزهٔ چندانی برای کاهش مصرف ندارد. سیگنال قیمتی دقیقاً جایی ضعیف است که بیشترین اثر را دارد.</a:t>
+            </a:r>
+          </a:p>
+        </p:txBody>
+      </p:sp>
+    </p:spTree>
+  </p:cSld>
+  <p:clrMapOvr>
+    <a:masterClrMapping/>
+  </p:clrMapOvr>
+</p:sld>
+</file>
+
+<file path=ppt/slides/slide13.xml><?xml version="1.0" encoding="utf-8"?>
+<p:sld xmlns:a="http://schemas.openxmlformats.org/drawingml/2006/main" xmlns:p="http://schemas.openxmlformats.org/presentationml/2006/main" xmlns:r="http://schemas.openxmlformats.org/officeDocument/2006/relationships">
+  <p:cSld>
+    <p:bg>
+      <p:bgPr>
+        <a:solidFill>
+          <a:srgbClr val="0A0E14"/>
+        </a:solidFill>
+        <a:effectLst/>
+      </p:bgPr>
+    </p:bg>
+    <p:spTree>
+      <p:nvGrpSpPr>
+        <p:cNvPr id="1" name=""/>
+        <p:cNvGrpSpPr/>
+        <p:nvPr/>
+      </p:nvGrpSpPr>
+      <p:grpSpPr/>
+      <p:sp>
+        <p:nvSpPr>
+          <p:cNvPr id="2" name="TextBox 1"/>
+          <p:cNvSpPr txBox="1"/>
+          <p:nvPr/>
+        </p:nvSpPr>
+        <p:spPr>
+          <a:xfrm>
+            <a:off x="566928" y="347472"/>
+            <a:ext cx="11064240" cy="310896"/>
+          </a:xfrm>
+          <a:prstGeom prst="rect">
+            <a:avLst/>
+          </a:prstGeom>
+          <a:noFill/>
+        </p:spPr>
+        <p:txBody>
+          <a:bodyPr wrap="square" anchor="t">
+            <a:spAutoFit/>
+          </a:bodyPr>
+          <a:lstStyle/>
+          <a:p>
+            <a:pPr algn="r" rtl="1">
+              <a:lnSpc>
+                <a:spcPct val="125000"/>
+              </a:lnSpc>
+            </a:pPr>
+            <a:r>
+              <a:rPr sz="1200" b="1">
+                <a:solidFill>
+                  <a:srgbClr val="F08040"/>
+                </a:solidFill>
+                <a:latin typeface="Tahoma"/>
+              </a:rPr>
+              <a:t>مقایسهٔ بین‌المللی</a:t>
+            </a:r>
+          </a:p>
+        </p:txBody>
+      </p:sp>
+      <p:sp>
+        <p:nvSpPr>
+          <p:cNvPr id="3" name="TextBox 2"/>
+          <p:cNvSpPr txBox="1"/>
+          <p:nvPr/>
+        </p:nvSpPr>
+        <p:spPr>
+          <a:xfrm>
+            <a:off x="566928" y="658368"/>
+            <a:ext cx="11064240" cy="658368"/>
+          </a:xfrm>
+          <a:prstGeom prst="rect">
+            <a:avLst/>
+          </a:prstGeom>
+          <a:noFill/>
+        </p:spPr>
+        <p:txBody>
+          <a:bodyPr wrap="square" anchor="t">
+            <a:spAutoFit/>
+          </a:bodyPr>
+          <a:lstStyle/>
+          <a:p>
+            <a:pPr algn="r" rtl="1">
+              <a:lnSpc>
+                <a:spcPct val="125000"/>
+              </a:lnSpc>
+            </a:pPr>
+            <a:r>
+              <a:rPr sz="3000" b="1">
+                <a:solidFill>
+                  <a:srgbClr val="F2F5F8"/>
+                </a:solidFill>
+                <a:latin typeface="Tahoma"/>
+              </a:rPr>
+              <a:t>ایران در مقایسه با جهان</a:t>
+            </a:r>
+          </a:p>
+        </p:txBody>
+      </p:sp>
+      <p:sp>
+        <p:nvSpPr>
+          <p:cNvPr id="4" name="Rounded Rectangle 3"/>
+          <p:cNvSpPr/>
+          <p:nvPr/>
+        </p:nvSpPr>
+        <p:spPr>
+          <a:xfrm>
+            <a:off x="6355080" y="1417320"/>
+            <a:ext cx="5276088" cy="2377440"/>
+          </a:xfrm>
+          <a:prstGeom prst="roundRect">
+            <a:avLst>
+              <a:gd name="adj" fmla="val 6000"/>
+            </a:avLst>
+          </a:prstGeom>
+          <a:solidFill>
+            <a:srgbClr val="141922"/>
+          </a:solidFill>
+          <a:ln>
+            <a:noFill/>
+          </a:ln>
+          <a:effectLst/>
+        </p:spPr>
+        <p:style>
+          <a:lnRef idx="1">
+            <a:schemeClr val="accent1"/>
+          </a:lnRef>
+          <a:fillRef idx="3">
+            <a:schemeClr val="accent1"/>
+          </a:fillRef>
+          <a:effectRef idx="2">
+            <a:schemeClr val="accent1"/>
+          </a:effectRef>
+          <a:fontRef idx="minor">
+            <a:schemeClr val="lt1"/>
+          </a:fontRef>
+        </p:style>
+        <p:txBody>
+          <a:bodyPr rtlCol="0" anchor="ctr"/>
+          <a:lstStyle/>
+          <a:p>
+            <a:pPr algn="ctr"/>
+          </a:p>
+        </p:txBody>
+      </p:sp>
+      <p:sp>
+        <p:nvSpPr>
+          <p:cNvPr id="5" name="TextBox 4"/>
+          <p:cNvSpPr txBox="1"/>
+          <p:nvPr/>
+        </p:nvSpPr>
+        <p:spPr>
+          <a:xfrm>
+            <a:off x="6583680" y="1600200"/>
+            <a:ext cx="4846320" cy="2011680"/>
+          </a:xfrm>
+          <a:prstGeom prst="rect">
+            <a:avLst/>
+          </a:prstGeom>
+          <a:noFill/>
+        </p:spPr>
+        <p:txBody>
+          <a:bodyPr wrap="square" anchor="t">
+            <a:spAutoFit/>
+          </a:bodyPr>
+          <a:lstStyle/>
+          <a:p>
+            <a:pPr algn="r" rtl="1">
+              <a:lnSpc>
+                <a:spcPct val="125000"/>
+              </a:lnSpc>
+            </a:pPr>
+            <a:r>
+              <a:rPr sz="1200" b="0">
+                <a:solidFill>
+                  <a:srgbClr val="A8B3C2"/>
+                </a:solidFill>
+                <a:latin typeface="Tahoma"/>
+              </a:rPr>
+              <a:t>مصرف گاز خانگی به‌ازای هر نفر</a:t>
+            </a:r>
+          </a:p>
+          <a:p>
+            <a:pPr algn="r" rtl="1">
+              <a:lnSpc>
+                <a:spcPct val="125000"/>
+              </a:lnSpc>
+            </a:pPr>
+            <a:r>
+              <a:rPr sz="1200" b="0">
+                <a:solidFill>
+                  <a:srgbClr val="A8B3C2"/>
+                </a:solidFill>
+                <a:latin typeface="Tahoma"/>
+              </a:rPr>
+              <a:t>• ایران — ۱۰۵۰٫۰ مترمکعب در سال</a:t>
+            </a:r>
+          </a:p>
+          <a:p>
+            <a:pPr algn="r" rtl="1">
+              <a:lnSpc>
+                <a:spcPct val="125000"/>
+              </a:lnSpc>
+            </a:pPr>
+            <a:r>
+              <a:rPr sz="1200" b="0">
+                <a:solidFill>
+                  <a:srgbClr val="A8B3C2"/>
+                </a:solidFill>
+                <a:latin typeface="Tahoma"/>
+              </a:rPr>
+              <a:t>• روسیه — ۸۳۰٫۰ مترمکعب در سال</a:t>
+            </a:r>
+          </a:p>
+          <a:p>
+            <a:pPr algn="r" rtl="1">
+              <a:lnSpc>
+                <a:spcPct val="125000"/>
+              </a:lnSpc>
+            </a:pPr>
+            <a:r>
+              <a:rPr sz="1200" b="0">
+                <a:solidFill>
+                  <a:srgbClr val="A8B3C2"/>
+                </a:solidFill>
+                <a:latin typeface="Tahoma"/>
+              </a:rPr>
+              <a:t>• ازبکستان — ۶۴۰٫۰ مترمکعب در سال</a:t>
+            </a:r>
+          </a:p>
+          <a:p>
+            <a:pPr algn="r" rtl="1">
+              <a:lnSpc>
+                <a:spcPct val="125000"/>
+              </a:lnSpc>
+            </a:pPr>
+            <a:r>
+              <a:rPr sz="1200" b="0">
+                <a:solidFill>
+                  <a:srgbClr val="A8B3C2"/>
+                </a:solidFill>
+                <a:latin typeface="Tahoma"/>
+              </a:rPr>
+              <a:t>• ترکیه — ۳۳۰٫۰ مترمکعب در سال</a:t>
+            </a:r>
+          </a:p>
+          <a:p>
+            <a:pPr algn="r" rtl="1">
+              <a:lnSpc>
+                <a:spcPct val="125000"/>
+              </a:lnSpc>
+            </a:pPr>
+            <a:r>
+              <a:rPr sz="1200" b="0">
+                <a:solidFill>
+                  <a:srgbClr val="A8B3C2"/>
+                </a:solidFill>
+                <a:latin typeface="Tahoma"/>
+              </a:rPr>
+              <a:t>• ایتالیا — ۳۱۰٫۰ مترمکعب در سال</a:t>
+            </a:r>
+          </a:p>
+          <a:p>
+            <a:pPr algn="r" rtl="1">
+              <a:lnSpc>
+                <a:spcPct val="125000"/>
+              </a:lnSpc>
+            </a:pPr>
+            <a:r>
+              <a:rPr sz="1200" b="0">
+                <a:solidFill>
+                  <a:srgbClr val="A8B3C2"/>
+                </a:solidFill>
+                <a:latin typeface="Tahoma"/>
+              </a:rPr>
+              <a:t>• آلمان — ۲۹۰٫۰ مترمکعب در سال</a:t>
+            </a:r>
+          </a:p>
+        </p:txBody>
+      </p:sp>
+      <p:sp>
+        <p:nvSpPr>
+          <p:cNvPr id="6" name="Rounded Rectangle 5"/>
+          <p:cNvSpPr/>
+          <p:nvPr/>
+        </p:nvSpPr>
+        <p:spPr>
+          <a:xfrm>
+            <a:off x="566928" y="1417320"/>
+            <a:ext cx="5532120" cy="2377440"/>
+          </a:xfrm>
+          <a:prstGeom prst="roundRect">
+            <a:avLst>
+              <a:gd name="adj" fmla="val 6000"/>
+            </a:avLst>
+          </a:prstGeom>
+          <a:solidFill>
+            <a:srgbClr val="141922"/>
+          </a:solidFill>
+          <a:ln>
+            <a:noFill/>
+          </a:ln>
+          <a:effectLst/>
+        </p:spPr>
+        <p:style>
+          <a:lnRef idx="1">
+            <a:schemeClr val="accent1"/>
+          </a:lnRef>
+          <a:fillRef idx="3">
+            <a:schemeClr val="accent1"/>
+          </a:fillRef>
+          <a:effectRef idx="2">
+            <a:schemeClr val="accent1"/>
+          </a:effectRef>
+          <a:fontRef idx="minor">
+            <a:schemeClr val="lt1"/>
+          </a:fontRef>
+        </p:style>
+        <p:txBody>
+          <a:bodyPr rtlCol="0" anchor="ctr"/>
+          <a:lstStyle/>
+          <a:p>
+            <a:pPr algn="ctr"/>
+          </a:p>
+        </p:txBody>
+      </p:sp>
+      <p:sp>
+        <p:nvSpPr>
+          <p:cNvPr id="7" name="TextBox 6"/>
+          <p:cNvSpPr txBox="1"/>
+          <p:nvPr/>
+        </p:nvSpPr>
+        <p:spPr>
+          <a:xfrm>
+            <a:off x="795528" y="1600200"/>
+            <a:ext cx="5120640" cy="2011680"/>
+          </a:xfrm>
+          <a:prstGeom prst="rect">
+            <a:avLst/>
+          </a:prstGeom>
+          <a:noFill/>
+        </p:spPr>
+        <p:txBody>
+          <a:bodyPr wrap="square" anchor="t">
+            <a:spAutoFit/>
+          </a:bodyPr>
+          <a:lstStyle/>
+          <a:p>
+            <a:pPr algn="r" rtl="1">
+              <a:lnSpc>
+                <a:spcPct val="125000"/>
+              </a:lnSpc>
+            </a:pPr>
+            <a:r>
+              <a:rPr sz="1200" b="0">
+                <a:solidFill>
+                  <a:srgbClr val="A8B3C2"/>
+                </a:solidFill>
+                <a:latin typeface="Tahoma"/>
+              </a:rPr>
+              <a:t>یارانهٔ انرژی به‌عنوان درصدی از تولید ناخالص داخلی</a:t>
+            </a:r>
+          </a:p>
+          <a:p>
+            <a:pPr algn="r" rtl="1">
+              <a:lnSpc>
+                <a:spcPct val="125000"/>
+              </a:lnSpc>
+            </a:pPr>
+            <a:r>
+              <a:rPr sz="1200" b="0">
+                <a:solidFill>
+                  <a:srgbClr val="A8B3C2"/>
+                </a:solidFill>
+                <a:latin typeface="Tahoma"/>
+              </a:rPr>
+              <a:t>• ایران — ۱۲٫۰ درصد</a:t>
+            </a:r>
+          </a:p>
+          <a:p>
+            <a:pPr algn="r" rtl="1">
+              <a:lnSpc>
+                <a:spcPct val="125000"/>
+              </a:lnSpc>
+            </a:pPr>
+            <a:r>
+              <a:rPr sz="1200" b="0">
+                <a:solidFill>
+                  <a:srgbClr val="A8B3C2"/>
+                </a:solidFill>
+                <a:latin typeface="Tahoma"/>
+              </a:rPr>
+              <a:t>• الجزایر — ۶٫۵ درصد</a:t>
+            </a:r>
+          </a:p>
+          <a:p>
+            <a:pPr algn="r" rtl="1">
+              <a:lnSpc>
+                <a:spcPct val="125000"/>
+              </a:lnSpc>
+            </a:pPr>
+            <a:r>
+              <a:rPr sz="1200" b="0">
+                <a:solidFill>
+                  <a:srgbClr val="A8B3C2"/>
+                </a:solidFill>
+                <a:latin typeface="Tahoma"/>
+              </a:rPr>
+              <a:t>• مصر — ۳٫۰ درصد</a:t>
+            </a:r>
+          </a:p>
+          <a:p>
+            <a:pPr algn="r" rtl="1">
+              <a:lnSpc>
+                <a:spcPct val="125000"/>
+              </a:lnSpc>
+            </a:pPr>
+            <a:r>
+              <a:rPr sz="1200" b="0">
+                <a:solidFill>
+                  <a:srgbClr val="A8B3C2"/>
+                </a:solidFill>
+                <a:latin typeface="Tahoma"/>
+              </a:rPr>
+              <a:t>• عربستان — ۲٫۵ درصد</a:t>
+            </a:r>
+          </a:p>
+          <a:p>
+            <a:pPr algn="r" rtl="1">
+              <a:lnSpc>
+                <a:spcPct val="125000"/>
+              </a:lnSpc>
+            </a:pPr>
+            <a:r>
+              <a:rPr sz="1200" b="0">
+                <a:solidFill>
+                  <a:srgbClr val="A8B3C2"/>
+                </a:solidFill>
+                <a:latin typeface="Tahoma"/>
+              </a:rPr>
+              <a:t>• روسیه — ۱٫۵ درصد</a:t>
+            </a:r>
+          </a:p>
+          <a:p>
+            <a:pPr algn="r" rtl="1">
+              <a:lnSpc>
+                <a:spcPct val="125000"/>
+              </a:lnSpc>
+            </a:pPr>
+            <a:r>
+              <a:rPr sz="1200" b="0">
+                <a:solidFill>
+                  <a:srgbClr val="A8B3C2"/>
+                </a:solidFill>
+                <a:latin typeface="Tahoma"/>
+              </a:rPr>
+              <a:t>• هند — ۱٫۰ درصد</a:t>
+            </a:r>
+          </a:p>
+        </p:txBody>
+      </p:sp>
+      <p:sp>
+        <p:nvSpPr>
+          <p:cNvPr id="8" name="Rounded Rectangle 7"/>
+          <p:cNvSpPr/>
+          <p:nvPr/>
+        </p:nvSpPr>
+        <p:spPr>
+          <a:xfrm>
+            <a:off x="566928" y="3977639"/>
+            <a:ext cx="11064240" cy="1965960"/>
+          </a:xfrm>
+          <a:prstGeom prst="roundRect">
+            <a:avLst>
+              <a:gd name="adj" fmla="val 6000"/>
+            </a:avLst>
+          </a:prstGeom>
+          <a:solidFill>
+            <a:srgbClr val="141922"/>
+          </a:solidFill>
+          <a:ln>
+            <a:noFill/>
+          </a:ln>
+          <a:effectLst/>
+        </p:spPr>
+        <p:style>
+          <a:lnRef idx="1">
+            <a:schemeClr val="accent1"/>
+          </a:lnRef>
+          <a:fillRef idx="3">
+            <a:schemeClr val="accent1"/>
+          </a:fillRef>
+          <a:effectRef idx="2">
+            <a:schemeClr val="accent1"/>
+          </a:effectRef>
+          <a:fontRef idx="minor">
+            <a:schemeClr val="lt1"/>
+          </a:fontRef>
+        </p:style>
+        <p:txBody>
+          <a:bodyPr rtlCol="0" anchor="ctr"/>
+          <a:lstStyle/>
+          <a:p>
+            <a:pPr algn="ctr"/>
+          </a:p>
+        </p:txBody>
+      </p:sp>
+      <p:sp>
+        <p:nvSpPr>
+          <p:cNvPr id="9" name="TextBox 8"/>
+          <p:cNvSpPr txBox="1"/>
+          <p:nvPr/>
+        </p:nvSpPr>
+        <p:spPr>
+          <a:xfrm>
+            <a:off x="795528" y="4114800"/>
+            <a:ext cx="10607040" cy="1691640"/>
+          </a:xfrm>
+          <a:prstGeom prst="rect">
+            <a:avLst/>
+          </a:prstGeom>
+          <a:noFill/>
+        </p:spPr>
+        <p:txBody>
+          <a:bodyPr wrap="square" anchor="t">
+            <a:spAutoFit/>
+          </a:bodyPr>
+          <a:lstStyle/>
+          <a:p>
+            <a:pPr algn="r" rtl="1">
+              <a:lnSpc>
+                <a:spcPct val="125000"/>
+              </a:lnSpc>
+            </a:pPr>
+            <a:r>
+              <a:rPr sz="1150" b="0">
+                <a:solidFill>
+                  <a:srgbClr val="A8B3C2"/>
+                </a:solidFill>
+                <a:latin typeface="Tahoma"/>
+              </a:rPr>
+              <a:t>ذخایر زیاد، مصرف زیاد</a:t>
+            </a:r>
+          </a:p>
+          <a:p>
+            <a:pPr algn="r" rtl="1">
+              <a:lnSpc>
+                <a:spcPct val="125000"/>
+              </a:lnSpc>
+            </a:pPr>
+            <a:r>
+              <a:rPr sz="1150" b="0">
+                <a:solidFill>
+                  <a:srgbClr val="A8B3C2"/>
+                </a:solidFill>
+                <a:latin typeface="Tahoma"/>
+              </a:rPr>
+              <a:t>ایران از بزرگ‌ترین دارندگان ذخایر گاز جهان است و همین فراوانی، تعرفهٔ ارزان و مصرف سرانهٔ بالا را تاریخاً توجیه کرده است.</a:t>
+            </a:r>
+          </a:p>
+          <a:p>
+            <a:pPr algn="r" rtl="1">
+              <a:lnSpc>
+                <a:spcPct val="125000"/>
+              </a:lnSpc>
+            </a:pPr>
+          </a:p>
+          <a:p>
+            <a:pPr algn="r" rtl="1">
+              <a:lnSpc>
+                <a:spcPct val="125000"/>
+              </a:lnSpc>
+            </a:pPr>
+            <a:r>
+              <a:rPr sz="1150" b="0">
+                <a:solidFill>
+                  <a:srgbClr val="A8B3C2"/>
+                </a:solidFill>
+                <a:latin typeface="Tahoma"/>
+              </a:rPr>
+              <a:t>همان الگو در سوخت‌های دیگر</a:t>
+            </a:r>
+          </a:p>
+          <a:p>
+            <a:pPr algn="r" rtl="1">
+              <a:lnSpc>
+                <a:spcPct val="125000"/>
+              </a:lnSpc>
+            </a:pPr>
+            <a:r>
+              <a:rPr sz="1150" b="0">
+                <a:solidFill>
+                  <a:srgbClr val="A8B3C2"/>
+                </a:solidFill>
+                <a:latin typeface="Tahoma"/>
+              </a:rPr>
+              <a:t>در یارانهٔ بنزین هم دهک‌های پردرآمد چند برابر دهک‌های کم‌درآمد بهره می‌برند. آنچه این گزارش برای گاز خانگی نشان می‌دهد، تکرار همان الگوست.</a:t>
+            </a:r>
+          </a:p>
+          <a:p>
+            <a:pPr algn="r" rtl="1">
+              <a:lnSpc>
+                <a:spcPct val="125000"/>
+              </a:lnSpc>
+            </a:pPr>
+          </a:p>
+          <a:p>
+            <a:pPr algn="r" rtl="1">
+              <a:lnSpc>
+                <a:spcPct val="125000"/>
+              </a:lnSpc>
+            </a:pPr>
+            <a:r>
+              <a:rPr sz="1150" b="0">
+                <a:solidFill>
+                  <a:srgbClr val="A8B3C2"/>
+                </a:solidFill>
+                <a:latin typeface="Tahoma"/>
+              </a:rPr>
+              <a:t>تجربهٔ کشورهایی که اصلاح کردند</a:t>
+            </a:r>
+          </a:p>
+          <a:p>
+            <a:pPr algn="r" rtl="1">
+              <a:lnSpc>
+                <a:spcPct val="125000"/>
+              </a:lnSpc>
+            </a:pPr>
+            <a:r>
+              <a:rPr sz="1150" b="0">
+                <a:solidFill>
+                  <a:srgbClr val="A8B3C2"/>
+                </a:solidFill>
+                <a:latin typeface="Tahoma"/>
+              </a:rPr>
+              <a:t>کشورهایی که یارانهٔ انرژی را هدفمند کرده‌اند یک نقطهٔ مشترک دارند: جایگزینی قیمت یکسان با تعرفهٔ پلکانیِ شیب‌دار، همراه با کمک نقدی هدفمند به‌جای یارانهٔ کالایی.</a:t>
+            </a:r>
+          </a:p>
+        </p:txBody>
+      </p:sp>
+      <p:sp>
+        <p:nvSpPr>
+          <p:cNvPr id="10" name="TextBox 9"/>
+          <p:cNvSpPr txBox="1"/>
+          <p:nvPr/>
+        </p:nvSpPr>
+        <p:spPr>
+          <a:xfrm>
+            <a:off x="566928" y="6035040"/>
+            <a:ext cx="11064240" cy="457200"/>
+          </a:xfrm>
+          <a:prstGeom prst="rect">
+            <a:avLst/>
+          </a:prstGeom>
+          <a:noFill/>
+        </p:spPr>
+        <p:txBody>
+          <a:bodyPr wrap="square" anchor="t">
+            <a:spAutoFit/>
+          </a:bodyPr>
+          <a:lstStyle/>
+          <a:p>
+            <a:pPr algn="r" rtl="1">
+              <a:lnSpc>
+                <a:spcPct val="125000"/>
+              </a:lnSpc>
+            </a:pPr>
+            <a:r>
+              <a:rPr sz="1000" b="0">
+                <a:solidFill>
+                  <a:srgbClr val="6F7D8F"/>
+                </a:solidFill>
+                <a:latin typeface="Tahoma"/>
+              </a:rPr>
+              <a:t>ارقام مقایسه‌ای تقریبی و از گزارش‌های عمومی نهادهای بین‌المللی برگرفته شده‌اند. پیش از انتشار رسمی، با منبع مورد تأیید سازمان بازبینی و در همین پنل به‌روزرسانی شوند.</a:t>
+            </a:r>
+          </a:p>
+        </p:txBody>
+      </p:sp>
+    </p:spTree>
+  </p:cSld>
+  <p:clrMapOvr>
+    <a:masterClrMapping/>
+  </p:clrMapOvr>
+</p:sld>
+</file>
+
+<file path=ppt/slides/slide14.xml><?xml version="1.0" encoding="utf-8"?>
+<p:sld xmlns:a="http://schemas.openxmlformats.org/drawingml/2006/main" xmlns:p="http://schemas.openxmlformats.org/presentationml/2006/main" xmlns:r="http://schemas.openxmlformats.org/officeDocument/2006/relationships">
+  <p:cSld>
+    <p:bg>
+      <p:bgPr>
+        <a:solidFill>
+          <a:srgbClr val="0A0E14"/>
+        </a:solidFill>
+        <a:effectLst/>
+      </p:bgPr>
+    </p:bg>
+    <p:spTree>
+      <p:nvGrpSpPr>
+        <p:cNvPr id="1" name=""/>
+        <p:cNvGrpSpPr/>
+        <p:nvPr/>
+      </p:nvGrpSpPr>
+      <p:grpSpPr/>
+      <p:sp>
+        <p:nvSpPr>
+          <p:cNvPr id="2" name="TextBox 1"/>
+          <p:cNvSpPr txBox="1"/>
+          <p:nvPr/>
+        </p:nvSpPr>
+        <p:spPr>
+          <a:xfrm>
+            <a:off x="566928" y="347472"/>
+            <a:ext cx="11064240" cy="310896"/>
+          </a:xfrm>
+          <a:prstGeom prst="rect">
+            <a:avLst/>
+          </a:prstGeom>
+          <a:noFill/>
+        </p:spPr>
+        <p:txBody>
+          <a:bodyPr wrap="square" anchor="t">
+            <a:spAutoFit/>
+          </a:bodyPr>
+          <a:lstStyle/>
+          <a:p>
+            <a:pPr algn="r" rtl="1">
+              <a:lnSpc>
+                <a:spcPct val="125000"/>
+              </a:lnSpc>
+            </a:pPr>
+            <a:r>
+              <a:rPr sz="1200" b="1">
+                <a:solidFill>
+                  <a:srgbClr val="F08040"/>
+                </a:solidFill>
+                <a:latin typeface="Tahoma"/>
+              </a:rPr>
+              <a:t>مسئله</a:t>
+            </a:r>
+          </a:p>
+        </p:txBody>
+      </p:sp>
+      <p:sp>
+        <p:nvSpPr>
+          <p:cNvPr id="3" name="TextBox 2"/>
+          <p:cNvSpPr txBox="1"/>
+          <p:nvPr/>
+        </p:nvSpPr>
+        <p:spPr>
+          <a:xfrm>
+            <a:off x="566928" y="658368"/>
+            <a:ext cx="11064240" cy="658368"/>
+          </a:xfrm>
+          <a:prstGeom prst="rect">
+            <a:avLst/>
+          </a:prstGeom>
+          <a:noFill/>
+        </p:spPr>
+        <p:txBody>
+          <a:bodyPr wrap="square" anchor="t">
+            <a:spAutoFit/>
+          </a:bodyPr>
+          <a:lstStyle/>
+          <a:p>
+            <a:pPr algn="r" rtl="1">
+              <a:lnSpc>
+                <a:spcPct val="125000"/>
+              </a:lnSpc>
+            </a:pPr>
+            <a:r>
+              <a:rPr sz="3000" b="1">
+                <a:solidFill>
+                  <a:srgbClr val="F2F5F8"/>
+                </a:solidFill>
+                <a:latin typeface="Tahoma"/>
+              </a:rPr>
+              <a:t>تعریف مسئله</a:t>
+            </a:r>
+          </a:p>
+        </p:txBody>
+      </p:sp>
+      <p:sp>
+        <p:nvSpPr>
+          <p:cNvPr id="4" name="Rounded Rectangle 3"/>
+          <p:cNvSpPr/>
+          <p:nvPr/>
+        </p:nvSpPr>
+        <p:spPr>
+          <a:xfrm>
+            <a:off x="566928" y="1417320"/>
+            <a:ext cx="11064240" cy="1828800"/>
+          </a:xfrm>
+          <a:prstGeom prst="roundRect">
+            <a:avLst>
+              <a:gd name="adj" fmla="val 6000"/>
+            </a:avLst>
+          </a:prstGeom>
+          <a:solidFill>
+            <a:srgbClr val="141922"/>
+          </a:solidFill>
+          <a:ln>
+            <a:noFill/>
+          </a:ln>
+          <a:effectLst/>
+        </p:spPr>
+        <p:style>
+          <a:lnRef idx="1">
+            <a:schemeClr val="accent1"/>
+          </a:lnRef>
+          <a:fillRef idx="3">
+            <a:schemeClr val="accent1"/>
+          </a:fillRef>
+          <a:effectRef idx="2">
+            <a:schemeClr val="accent1"/>
+          </a:effectRef>
+          <a:fontRef idx="minor">
+            <a:schemeClr val="lt1"/>
+          </a:fontRef>
+        </p:style>
+        <p:txBody>
+          <a:bodyPr rtlCol="0" anchor="ctr"/>
+          <a:lstStyle/>
+          <a:p>
+            <a:pPr algn="ctr"/>
+          </a:p>
+        </p:txBody>
+      </p:sp>
+      <p:sp>
+        <p:nvSpPr>
+          <p:cNvPr id="5" name="TextBox 4"/>
+          <p:cNvSpPr txBox="1"/>
+          <p:nvPr/>
+        </p:nvSpPr>
+        <p:spPr>
+          <a:xfrm>
+            <a:off x="795528" y="1645920"/>
+            <a:ext cx="10607040" cy="1463040"/>
+          </a:xfrm>
+          <a:prstGeom prst="rect">
+            <a:avLst/>
+          </a:prstGeom>
+          <a:noFill/>
+        </p:spPr>
+        <p:txBody>
+          <a:bodyPr wrap="square" anchor="t">
+            <a:spAutoFit/>
+          </a:bodyPr>
+          <a:lstStyle/>
+          <a:p>
+            <a:pPr algn="r" rtl="1">
+              <a:lnSpc>
+                <a:spcPct val="125000"/>
+              </a:lnSpc>
+            </a:pPr>
+            <a:r>
+              <a:rPr sz="1300" b="0">
+                <a:solidFill>
+                  <a:srgbClr val="A8B3C2"/>
+                </a:solidFill>
+                <a:latin typeface="Tahoma"/>
+              </a:rPr>
+              <a:t>اگر یارانهٔ گاز خانگی را هزینه‌ای عمومی بدانیم، پرسش سیاستی روشن است: این هزینه با چه دقتی به کسانی می‌رسد که واقعاً به آن نیاز دارند؟ داده‌های این گزارش پاسخ می‌دهند: نه با دقت زیاد. اقلیم تنها بخشی از مصرف مازاد را توضیح می‌دهد، پس نمی‌توان همهٔ آن را «نیاز اقلیمی موجه» دانست.</a:t>
+            </a:r>
+          </a:p>
+        </p:txBody>
+      </p:sp>
+      <p:sp>
+        <p:nvSpPr>
+          <p:cNvPr id="6" name="Rounded Rectangle 5"/>
+          <p:cNvSpPr/>
+          <p:nvPr/>
+        </p:nvSpPr>
+        <p:spPr>
+          <a:xfrm>
+            <a:off x="566928" y="3429000"/>
+            <a:ext cx="11064240" cy="2514600"/>
+          </a:xfrm>
+          <a:prstGeom prst="roundRect">
+            <a:avLst>
+              <a:gd name="adj" fmla="val 6000"/>
+            </a:avLst>
+          </a:prstGeom>
+          <a:solidFill>
+            <a:srgbClr val="141922"/>
+          </a:solidFill>
+          <a:ln>
+            <a:noFill/>
+          </a:ln>
+          <a:effectLst/>
+        </p:spPr>
+        <p:style>
+          <a:lnRef idx="1">
+            <a:schemeClr val="accent1"/>
+          </a:lnRef>
+          <a:fillRef idx="3">
+            <a:schemeClr val="accent1"/>
+          </a:fillRef>
+          <a:effectRef idx="2">
+            <a:schemeClr val="accent1"/>
+          </a:effectRef>
+          <a:fontRef idx="minor">
+            <a:schemeClr val="lt1"/>
+          </a:fontRef>
+        </p:style>
+        <p:txBody>
+          <a:bodyPr rtlCol="0" anchor="ctr"/>
+          <a:lstStyle/>
+          <a:p>
+            <a:pPr algn="ctr"/>
+          </a:p>
+        </p:txBody>
+      </p:sp>
+      <p:sp>
+        <p:nvSpPr>
+          <p:cNvPr id="7" name="TextBox 6"/>
+          <p:cNvSpPr txBox="1"/>
+          <p:nvPr/>
+        </p:nvSpPr>
+        <p:spPr>
+          <a:xfrm>
+            <a:off x="795528" y="3611880"/>
+            <a:ext cx="10607040" cy="2194560"/>
+          </a:xfrm>
+          <a:prstGeom prst="rect">
+            <a:avLst/>
+          </a:prstGeom>
+          <a:noFill/>
+        </p:spPr>
+        <p:txBody>
+          <a:bodyPr wrap="square" anchor="t">
+            <a:spAutoFit/>
+          </a:bodyPr>
+          <a:lstStyle/>
+          <a:p>
+            <a:pPr algn="r" rtl="1">
+              <a:lnSpc>
+                <a:spcPct val="125000"/>
+              </a:lnSpc>
+            </a:pPr>
+            <a:r>
+              <a:rPr sz="1300" b="0">
+                <a:solidFill>
+                  <a:srgbClr val="F2F5F8"/>
+                </a:solidFill>
+                <a:latin typeface="Tahoma"/>
+              </a:rPr>
+              <a:t>نتیجه‌گیری</a:t>
+            </a:r>
+          </a:p>
+          <a:p>
+            <a:pPr algn="r" rtl="1">
+              <a:lnSpc>
+                <a:spcPct val="125000"/>
+              </a:lnSpc>
+            </a:pPr>
+            <a:r>
+              <a:rPr sz="1300" b="0">
+                <a:solidFill>
+                  <a:srgbClr val="F2F5F8"/>
+                </a:solidFill>
+                <a:latin typeface="Tahoma"/>
+              </a:rPr>
+              <a:t>داده‌ها یک نکته را روشن می‌گویند: مسئلهٔ گاز خانگی ایران بیش از آنکه مسئلهٔ کمبود باشد، مسئلهٔ توزیع است. اکثریت بزرگی از مشترکین کم‌مصرف‌اند و اقلیتی کوچک سهم نامتناسبی از گاز و یارانهٔ پنهان را می‌برند. چون بخش مهمی از این مصرف مازاد را اقلیم توضیح نمی‌دهد، فضای واقعی برای سیاست‌گذاری وجود دارد — و اهرم اصلی، شیب تعرفه در پله‌های بالای نردبان است.</a:t>
+            </a:r>
+          </a:p>
+        </p:txBody>
+      </p:sp>
+    </p:spTree>
+  </p:cSld>
+  <p:clrMapOvr>
+    <a:masterClrMapping/>
+  </p:clrMapOvr>
+</p:sld>
+</file>
+
+<file path=ppt/slides/slide15.xml><?xml version="1.0" encoding="utf-8"?>
+<p:sld xmlns:a="http://schemas.openxmlformats.org/drawingml/2006/main" xmlns:p="http://schemas.openxmlformats.org/presentationml/2006/main" xmlns:r="http://schemas.openxmlformats.org/officeDocument/2006/relationships">
+  <p:cSld>
+    <p:bg>
+      <p:bgPr>
+        <a:solidFill>
+          <a:srgbClr val="0A0E14"/>
+        </a:solidFill>
+        <a:effectLst/>
+      </p:bgPr>
+    </p:bg>
+    <p:spTree>
+      <p:nvGrpSpPr>
+        <p:cNvPr id="1" name=""/>
+        <p:cNvGrpSpPr/>
+        <p:nvPr/>
+      </p:nvGrpSpPr>
+      <p:grpSpPr/>
+      <p:sp>
+        <p:nvSpPr>
+          <p:cNvPr id="2" name="TextBox 1"/>
+          <p:cNvSpPr txBox="1"/>
+          <p:nvPr/>
+        </p:nvSpPr>
+        <p:spPr>
+          <a:xfrm>
+            <a:off x="566928" y="347472"/>
+            <a:ext cx="11064240" cy="310896"/>
+          </a:xfrm>
+          <a:prstGeom prst="rect">
+            <a:avLst/>
+          </a:prstGeom>
+          <a:noFill/>
+        </p:spPr>
+        <p:txBody>
+          <a:bodyPr wrap="square" anchor="t">
+            <a:spAutoFit/>
+          </a:bodyPr>
+          <a:lstStyle/>
+          <a:p>
+            <a:pPr algn="r" rtl="1">
+              <a:lnSpc>
+                <a:spcPct val="125000"/>
+              </a:lnSpc>
+            </a:pPr>
+            <a:r>
+              <a:rPr sz="1200" b="1">
+                <a:solidFill>
+                  <a:srgbClr val="F08040"/>
+                </a:solidFill>
+                <a:latin typeface="Tahoma"/>
+              </a:rPr>
+              <a:t>راهکار</a:t>
+            </a:r>
+          </a:p>
+        </p:txBody>
+      </p:sp>
+      <p:sp>
+        <p:nvSpPr>
+          <p:cNvPr id="3" name="TextBox 2"/>
+          <p:cNvSpPr txBox="1"/>
+          <p:nvPr/>
+        </p:nvSpPr>
+        <p:spPr>
+          <a:xfrm>
+            <a:off x="566928" y="658368"/>
+            <a:ext cx="11064240" cy="658368"/>
+          </a:xfrm>
+          <a:prstGeom prst="rect">
+            <a:avLst/>
+          </a:prstGeom>
+          <a:noFill/>
+        </p:spPr>
+        <p:txBody>
+          <a:bodyPr wrap="square" anchor="t">
+            <a:spAutoFit/>
+          </a:bodyPr>
+          <a:lstStyle/>
+          <a:p>
+            <a:pPr algn="r" rtl="1">
+              <a:lnSpc>
+                <a:spcPct val="125000"/>
+              </a:lnSpc>
+            </a:pPr>
+            <a:r>
+              <a:rPr sz="3000" b="1">
+                <a:solidFill>
+                  <a:srgbClr val="F2F5F8"/>
+                </a:solidFill>
+                <a:latin typeface="Tahoma"/>
+              </a:rPr>
+              <a:t>راهکارهای عملی</a:t>
+            </a:r>
+          </a:p>
+        </p:txBody>
+      </p:sp>
+      <p:sp>
+        <p:nvSpPr>
+          <p:cNvPr id="4" name="Rounded Rectangle 3"/>
+          <p:cNvSpPr/>
+          <p:nvPr/>
+        </p:nvSpPr>
+        <p:spPr>
+          <a:xfrm>
+            <a:off x="6355080" y="1417320"/>
+            <a:ext cx="5276088" cy="4526280"/>
+          </a:xfrm>
+          <a:prstGeom prst="roundRect">
+            <a:avLst>
+              <a:gd name="adj" fmla="val 6000"/>
+            </a:avLst>
+          </a:prstGeom>
+          <a:solidFill>
+            <a:srgbClr val="141922"/>
+          </a:solidFill>
+          <a:ln>
+            <a:noFill/>
+          </a:ln>
+          <a:effectLst/>
+        </p:spPr>
+        <p:style>
+          <a:lnRef idx="1">
+            <a:schemeClr val="accent1"/>
+          </a:lnRef>
+          <a:fillRef idx="3">
+            <a:schemeClr val="accent1"/>
+          </a:fillRef>
+          <a:effectRef idx="2">
+            <a:schemeClr val="accent1"/>
+          </a:effectRef>
+          <a:fontRef idx="minor">
+            <a:schemeClr val="lt1"/>
+          </a:fontRef>
+        </p:style>
+        <p:txBody>
+          <a:bodyPr rtlCol="0" anchor="ctr"/>
+          <a:lstStyle/>
+          <a:p>
+            <a:pPr algn="ctr"/>
+          </a:p>
+        </p:txBody>
+      </p:sp>
+      <p:sp>
+        <p:nvSpPr>
+          <p:cNvPr id="5" name="TextBox 4"/>
+          <p:cNvSpPr txBox="1"/>
+          <p:nvPr/>
+        </p:nvSpPr>
+        <p:spPr>
+          <a:xfrm>
+            <a:off x="6583680" y="1600200"/>
+            <a:ext cx="4818888" cy="4160520"/>
+          </a:xfrm>
+          <a:prstGeom prst="rect">
+            <a:avLst/>
+          </a:prstGeom>
+          <a:noFill/>
+        </p:spPr>
+        <p:txBody>
+          <a:bodyPr wrap="square" anchor="t">
+            <a:spAutoFit/>
+          </a:bodyPr>
+          <a:lstStyle/>
+          <a:p>
+            <a:pPr algn="r" rtl="1">
+              <a:lnSpc>
+                <a:spcPct val="125000"/>
+              </a:lnSpc>
+            </a:pPr>
+            <a:r>
+              <a:rPr sz="1150" b="0">
+                <a:solidFill>
+                  <a:srgbClr val="A8B3C2"/>
+                </a:solidFill>
+                <a:latin typeface="Tahoma"/>
+              </a:rPr>
+              <a:t>شیب قیمتی پله‌های بالا را تندتر کنید  (کوتاه‌مدت · بالا)</a:t>
+            </a:r>
+          </a:p>
+          <a:p>
+            <a:pPr algn="r" rtl="1">
+              <a:lnSpc>
+                <a:spcPct val="125000"/>
+              </a:lnSpc>
+            </a:pPr>
+            <a:r>
+              <a:rPr sz="1150" b="0">
+                <a:solidFill>
+                  <a:srgbClr val="A8B3C2"/>
+                </a:solidFill>
+                <a:latin typeface="Tahoma"/>
+              </a:rPr>
+              <a:t>تندترکردن شیب در پله‌های بالای نردبان، دقیقاً همان اقلیتی را هدف می‌گیرد که بیشترین سهم مصرف مازاد را دارند، بدون آنکه به پله‌های کم‌مصرف فشار بیاورد.</a:t>
+            </a:r>
+          </a:p>
+          <a:p>
+            <a:pPr algn="r" rtl="1">
+              <a:lnSpc>
+                <a:spcPct val="125000"/>
+              </a:lnSpc>
+            </a:pPr>
+          </a:p>
+          <a:p>
+            <a:pPr algn="r" rtl="1">
+              <a:lnSpc>
+                <a:spcPct val="125000"/>
+              </a:lnSpc>
+            </a:pPr>
+            <a:r>
+              <a:rPr sz="1150" b="0">
+                <a:solidFill>
+                  <a:srgbClr val="A8B3C2"/>
+                </a:solidFill>
+                <a:latin typeface="Tahoma"/>
+              </a:rPr>
+              <a:t>الگوی مصرف را اقلیمی کنید  (میان‌مدت · بالا)</a:t>
+            </a:r>
+          </a:p>
+          <a:p>
+            <a:pPr algn="r" rtl="1">
+              <a:lnSpc>
+                <a:spcPct val="125000"/>
+              </a:lnSpc>
+            </a:pPr>
+            <a:r>
+              <a:rPr sz="1150" b="0">
+                <a:solidFill>
+                  <a:srgbClr val="A8B3C2"/>
+                </a:solidFill>
+                <a:latin typeface="Tahoma"/>
+              </a:rPr>
+              <a:t>سقف الگو در استان سرد و گرم نباید یکی باشد. تعریف الگوی متناسب با دمای هر منطقه، مصرف موجه را از مصرف ناکارآمد جدا می‌کند.</a:t>
+            </a:r>
+          </a:p>
+          <a:p>
+            <a:pPr algn="r" rtl="1">
+              <a:lnSpc>
+                <a:spcPct val="125000"/>
+              </a:lnSpc>
+            </a:pPr>
+          </a:p>
+          <a:p>
+            <a:pPr algn="r" rtl="1">
+              <a:lnSpc>
+                <a:spcPct val="125000"/>
+              </a:lnSpc>
+            </a:pPr>
+            <a:r>
+              <a:rPr sz="1150" b="0">
+                <a:solidFill>
+                  <a:srgbClr val="A8B3C2"/>
+                </a:solidFill>
+                <a:latin typeface="Tahoma"/>
+              </a:rPr>
+              <a:t>عایق‌بندی را جایی که مؤثر است تشویق کنید  (میان‌مدت · متوسط)</a:t>
+            </a:r>
+          </a:p>
+          <a:p>
+            <a:pPr algn="r" rtl="1">
+              <a:lnSpc>
+                <a:spcPct val="125000"/>
+              </a:lnSpc>
+            </a:pPr>
+            <a:r>
+              <a:rPr sz="1150" b="0">
+                <a:solidFill>
+                  <a:srgbClr val="A8B3C2"/>
+                </a:solidFill>
+                <a:latin typeface="Tahoma"/>
+              </a:rPr>
+              <a:t>استان‌هایی که بیش از آنچه دمایشان توجیه می‌کند مصرف دارند، بازدهی سرمایه‌گذاری در بهسازی ساختمان و تعویض وسایل گرمایشی در آن‌ها بیشترین است.</a:t>
+            </a:r>
+          </a:p>
+        </p:txBody>
+      </p:sp>
+      <p:sp>
+        <p:nvSpPr>
+          <p:cNvPr id="6" name="Rounded Rectangle 5"/>
+          <p:cNvSpPr/>
+          <p:nvPr/>
+        </p:nvSpPr>
+        <p:spPr>
+          <a:xfrm>
+            <a:off x="566928" y="1417320"/>
+            <a:ext cx="5532120" cy="4526280"/>
+          </a:xfrm>
+          <a:prstGeom prst="roundRect">
+            <a:avLst>
+              <a:gd name="adj" fmla="val 6000"/>
+            </a:avLst>
+          </a:prstGeom>
+          <a:solidFill>
+            <a:srgbClr val="141922"/>
+          </a:solidFill>
+          <a:ln>
+            <a:noFill/>
+          </a:ln>
+          <a:effectLst/>
+        </p:spPr>
+        <p:style>
+          <a:lnRef idx="1">
+            <a:schemeClr val="accent1"/>
+          </a:lnRef>
+          <a:fillRef idx="3">
+            <a:schemeClr val="accent1"/>
+          </a:fillRef>
+          <a:effectRef idx="2">
+            <a:schemeClr val="accent1"/>
+          </a:effectRef>
+          <a:fontRef idx="minor">
+            <a:schemeClr val="lt1"/>
+          </a:fontRef>
+        </p:style>
+        <p:txBody>
+          <a:bodyPr rtlCol="0" anchor="ctr"/>
+          <a:lstStyle/>
+          <a:p>
+            <a:pPr algn="ctr"/>
+          </a:p>
+        </p:txBody>
+      </p:sp>
+      <p:sp>
+        <p:nvSpPr>
+          <p:cNvPr id="7" name="TextBox 6"/>
+          <p:cNvSpPr txBox="1"/>
+          <p:nvPr/>
+        </p:nvSpPr>
+        <p:spPr>
+          <a:xfrm>
+            <a:off x="795528" y="1600200"/>
+            <a:ext cx="5074920" cy="4160520"/>
+          </a:xfrm>
+          <a:prstGeom prst="rect">
+            <a:avLst/>
+          </a:prstGeom>
+          <a:noFill/>
+        </p:spPr>
+        <p:txBody>
+          <a:bodyPr wrap="square" anchor="t">
+            <a:spAutoFit/>
+          </a:bodyPr>
+          <a:lstStyle/>
+          <a:p>
+            <a:pPr algn="r" rtl="1">
+              <a:lnSpc>
+                <a:spcPct val="125000"/>
+              </a:lnSpc>
+            </a:pPr>
+            <a:r>
+              <a:rPr sz="1150" b="0">
+                <a:solidFill>
+                  <a:srgbClr val="A8B3C2"/>
+                </a:solidFill>
+                <a:latin typeface="Tahoma"/>
+              </a:rPr>
+              <a:t>صرفه‌جویی را به جیب مشترک برگردانید  (کوتاه‌مدت · متوسط)</a:t>
+            </a:r>
+          </a:p>
+          <a:p>
+            <a:pPr algn="r" rtl="1">
+              <a:lnSpc>
+                <a:spcPct val="125000"/>
+              </a:lnSpc>
+            </a:pPr>
+            <a:r>
+              <a:rPr sz="1150" b="0">
+                <a:solidFill>
+                  <a:srgbClr val="A8B3C2"/>
+                </a:solidFill>
+                <a:latin typeface="Tahoma"/>
+              </a:rPr>
+              <a:t>پاداش نقدی برای ماندن زیر الگو، سیگنال قیمتی را دوطرفه می‌کند: هم جریمهٔ پرمصرفی و هم پاداش کم‌مصرفی.</a:t>
+            </a:r>
+          </a:p>
+          <a:p>
+            <a:pPr algn="r" rtl="1">
+              <a:lnSpc>
+                <a:spcPct val="125000"/>
+              </a:lnSpc>
+            </a:pPr>
+          </a:p>
+          <a:p>
+            <a:pPr algn="r" rtl="1">
+              <a:lnSpc>
+                <a:spcPct val="125000"/>
+              </a:lnSpc>
+            </a:pPr>
+            <a:r>
+              <a:rPr sz="1150" b="0">
+                <a:solidFill>
+                  <a:srgbClr val="A8B3C2"/>
+                </a:solidFill>
+                <a:latin typeface="Tahoma"/>
+              </a:rPr>
+              <a:t>شفافیت مصرف را به خود مشترک بدهید  (کوتاه‌مدت · متوسط)</a:t>
+            </a:r>
+          </a:p>
+          <a:p>
+            <a:pPr algn="r" rtl="1">
+              <a:lnSpc>
+                <a:spcPct val="125000"/>
+              </a:lnSpc>
+            </a:pPr>
+            <a:r>
+              <a:rPr sz="1150" b="0">
+                <a:solidFill>
+                  <a:srgbClr val="A8B3C2"/>
+                </a:solidFill>
+                <a:latin typeface="Tahoma"/>
+              </a:rPr>
+              <a:t>وقتی مشترک بداند در کدام پله است و تا سقف الگو چقدر فاصله دارد، رفتارش تغییر می‌کند. این ارزان‌ترین ابزار در کل فهرست است.</a:t>
+            </a:r>
+          </a:p>
+        </p:txBody>
+      </p:sp>
+    </p:spTree>
+  </p:cSld>
+  <p:clrMapOvr>
+    <a:masterClrMapping/>
+  </p:clrMapOvr>
+</p:sld>
+</file>
+
+<file path=ppt/slides/slide16.xml><?xml version="1.0" encoding="utf-8"?>
 <p:sld xmlns:a="http://schemas.openxmlformats.org/drawingml/2006/main" xmlns:p="http://schemas.openxmlformats.org/presentationml/2006/main" xmlns:r="http://schemas.openxmlformats.org/officeDocument/2006/relationships">
   <p:cSld>
     <p:bg>

--- a/downloads/gas-presentation-1404.pptx
+++ b/downloads/gas-presentation-1404.pptx
@@ -3297,7 +3297,7 @@
                 </a:solidFill>
                 <a:latin typeface="Tahoma"/>
               </a:rPr>
-              <a:t>آناتومی یک زمستان</a:t>
+              <a:t>آناتومی یک نردبان</a:t>
             </a:r>
           </a:p>
         </p:txBody>
@@ -3391,7 +3391,7 @@
                 </a:solidFill>
                 <a:latin typeface="Tahoma"/>
               </a:rPr>
-              <a:t>۳۱ استان · ۱۲ پلهٔ دورهٔ سرد · ۴ پلهٔ دورهٔ گرم · گزارش ۱۴۰۵/۰۵/۱۸</a:t>
+              <a:t>۳۱ استان · ۱۲ پلهٔ دورهٔ گرم · ۴ پلهٔ دورهٔ سرد · گزارش ۱۴۰۵/۰۵/۱۸</a:t>
             </a:r>
           </a:p>
         </p:txBody>
@@ -3694,7 +3694,7 @@
                 </a:solidFill>
                 <a:latin typeface="Tahoma"/>
               </a:rPr>
-              <a:t>از ۱٫۷× در دورهٔ گرم به ۴٫۷× در دورهٔ سرد.</a:t>
+              <a:t>از ۱٫۷× در دورهٔ سرد به ۴٫۷× در دورهٔ گرم.</a:t>
             </a:r>
           </a:p>
         </p:txBody>
@@ -6877,7 +6877,7 @@
                 </a:solidFill>
                 <a:latin typeface="Tahoma"/>
               </a:rPr>
-              <a:t>سرما فقط بخشی از ماجراست</a:t>
+              <a:t>اقلیم فقط بخشی از ماجراست</a:t>
             </a:r>
           </a:p>
           <a:p>
@@ -8534,7 +8534,7 @@
                 </a:solidFill>
                 <a:latin typeface="Tahoma"/>
               </a:rPr>
-              <a:t>چهار جدول منتشرشدهٔ مدیریت گازرسانی — امور تعرفه‌ها و قراردادها: درصد مصرف و درصد تعداد مشترکین بخش خانگی، برای نیمهٔ اول (دورهٔ سرد، ۱۲ پله) و نیمهٔ دوم (دورهٔ گرم، ۴ پله) سال ۱۴۰۴.</a:t>
+              <a:t>چهار جدول منتشرشدهٔ مدیریت گازرسانی — امور تعرفه‌ها و قراردادها: درصد مصرف و درصد تعداد مشترکین بخش خانگی، برای نیمهٔ اول (دورهٔ گرم، ۱۲ پله) و نیمهٔ دوم (دورهٔ سرد، ۴ پله) سال ۱۴۰۴.</a:t>
             </a:r>
           </a:p>
           <a:p>
